--- a/output/abschlusspraesentation-2026-09-11.pptx
+++ b/output/abschlusspraesentation-2026-09-11.pptx
@@ -325,7 +325,7 @@
           <a:p>
             <a:fld id="{5BCAD085-E8A6-8845-BD4E-CB4CCA059FC4}" type="datetimeFigureOut">
               <a:rPr lang="en-US" smtClean="0"/>
-              <a:t>9/10/2026</a:t>
+              <a:t>9/11/2026</a:t>
             </a:fld>
             <a:endParaRPr lang="en-US"/>
           </a:p>
@@ -493,7 +493,7 @@
           <a:p>
             <a:fld id="{5BCAD085-E8A6-8845-BD4E-CB4CCA059FC4}" type="datetimeFigureOut">
               <a:rPr lang="en-US" smtClean="0"/>
-              <a:t>9/10/2026</a:t>
+              <a:t>9/11/2026</a:t>
             </a:fld>
             <a:endParaRPr lang="en-US"/>
           </a:p>
@@ -671,7 +671,7 @@
           <a:p>
             <a:fld id="{5BCAD085-E8A6-8845-BD4E-CB4CCA059FC4}" type="datetimeFigureOut">
               <a:rPr lang="en-US" smtClean="0"/>
-              <a:t>9/10/2026</a:t>
+              <a:t>9/11/2026</a:t>
             </a:fld>
             <a:endParaRPr lang="en-US"/>
           </a:p>
@@ -839,7 +839,7 @@
           <a:p>
             <a:fld id="{5BCAD085-E8A6-8845-BD4E-CB4CCA059FC4}" type="datetimeFigureOut">
               <a:rPr lang="en-US" smtClean="0"/>
-              <a:t>9/10/2026</a:t>
+              <a:t>9/11/2026</a:t>
             </a:fld>
             <a:endParaRPr lang="en-US"/>
           </a:p>
@@ -1084,7 +1084,7 @@
           <a:p>
             <a:fld id="{5BCAD085-E8A6-8845-BD4E-CB4CCA059FC4}" type="datetimeFigureOut">
               <a:rPr lang="en-US" smtClean="0"/>
-              <a:t>9/10/2026</a:t>
+              <a:t>9/11/2026</a:t>
             </a:fld>
             <a:endParaRPr lang="en-US"/>
           </a:p>
@@ -1369,7 +1369,7 @@
           <a:p>
             <a:fld id="{5BCAD085-E8A6-8845-BD4E-CB4CCA059FC4}" type="datetimeFigureOut">
               <a:rPr lang="en-US" smtClean="0"/>
-              <a:t>9/10/2026</a:t>
+              <a:t>9/11/2026</a:t>
             </a:fld>
             <a:endParaRPr lang="en-US"/>
           </a:p>
@@ -1788,7 +1788,7 @@
           <a:p>
             <a:fld id="{5BCAD085-E8A6-8845-BD4E-CB4CCA059FC4}" type="datetimeFigureOut">
               <a:rPr lang="en-US" smtClean="0"/>
-              <a:t>9/10/2026</a:t>
+              <a:t>9/11/2026</a:t>
             </a:fld>
             <a:endParaRPr lang="en-US"/>
           </a:p>
@@ -1905,7 +1905,7 @@
           <a:p>
             <a:fld id="{5BCAD085-E8A6-8845-BD4E-CB4CCA059FC4}" type="datetimeFigureOut">
               <a:rPr lang="en-US" smtClean="0"/>
-              <a:t>9/10/2026</a:t>
+              <a:t>9/11/2026</a:t>
             </a:fld>
             <a:endParaRPr lang="en-US"/>
           </a:p>
@@ -2000,7 +2000,7 @@
           <a:p>
             <a:fld id="{5BCAD085-E8A6-8845-BD4E-CB4CCA059FC4}" type="datetimeFigureOut">
               <a:rPr lang="en-US" smtClean="0"/>
-              <a:t>9/10/2026</a:t>
+              <a:t>9/11/2026</a:t>
             </a:fld>
             <a:endParaRPr lang="en-US"/>
           </a:p>
@@ -2275,7 +2275,7 @@
           <a:p>
             <a:fld id="{5BCAD085-E8A6-8845-BD4E-CB4CCA059FC4}" type="datetimeFigureOut">
               <a:rPr lang="en-US" smtClean="0"/>
-              <a:t>9/10/2026</a:t>
+              <a:t>9/11/2026</a:t>
             </a:fld>
             <a:endParaRPr lang="en-US"/>
           </a:p>
@@ -2527,7 +2527,7 @@
           <a:p>
             <a:fld id="{5BCAD085-E8A6-8845-BD4E-CB4CCA059FC4}" type="datetimeFigureOut">
               <a:rPr lang="en-US" smtClean="0"/>
-              <a:t>9/10/2026</a:t>
+              <a:t>9/11/2026</a:t>
             </a:fld>
             <a:endParaRPr lang="en-US"/>
           </a:p>
@@ -2738,7 +2738,7 @@
           <a:p>
             <a:fld id="{5BCAD085-E8A6-8845-BD4E-CB4CCA059FC4}" type="datetimeFigureOut">
               <a:rPr lang="en-US" smtClean="0"/>
-              <a:t>9/10/2026</a:t>
+              <a:t>9/11/2026</a:t>
             </a:fld>
             <a:endParaRPr lang="en-US"/>
           </a:p>
@@ -21856,7 +21856,7 @@
         <p:spPr>
           <a:xfrm>
             <a:off x="5303520" y="5285232"/>
-            <a:ext cx="6400800" cy="640080"/>
+            <a:ext cx="6400800" cy="249748"/>
           </a:xfrm>
           <a:prstGeom prst="rect">
             <a:avLst/>
@@ -21875,14 +21875,101 @@
               </a:lnSpc>
             </a:pPr>
             <a:r>
+              <a:rPr sz="1200" b="0" dirty="0">
+                <a:solidFill>
+                  <a:srgbClr val="55677A"/>
+                </a:solidFill>
+                <a:latin typeface="Arial"/>
+              </a:rPr>
+              <a:t>Und </a:t>
+            </a:r>
+            <a:r>
+              <a:rPr sz="1200" b="0" dirty="0" err="1">
+                <a:solidFill>
+                  <a:srgbClr val="55677A"/>
+                </a:solidFill>
+                <a:latin typeface="Arial"/>
+              </a:rPr>
+              <a:t>sind</a:t>
+            </a:r>
+            <a:r>
+              <a:rPr sz="1200" b="0" dirty="0">
+                <a:solidFill>
+                  <a:srgbClr val="55677A"/>
+                </a:solidFill>
+                <a:latin typeface="Arial"/>
+              </a:rPr>
+              <a:t> </a:t>
+            </a:r>
+            <a:r>
+              <a:rPr sz="1200" b="0" dirty="0" err="1">
+                <a:solidFill>
+                  <a:srgbClr val="55677A"/>
+                </a:solidFill>
+                <a:latin typeface="Arial"/>
+              </a:rPr>
+              <a:t>bei</a:t>
+            </a:r>
+            <a:r>
+              <a:rPr sz="1200" b="0" dirty="0">
+                <a:solidFill>
+                  <a:srgbClr val="55677A"/>
+                </a:solidFill>
+                <a:latin typeface="Arial"/>
+              </a:rPr>
+              <a:t> fast </a:t>
+            </a:r>
+            <a:r>
+              <a:rPr sz="1200" b="0" dirty="0" err="1">
+                <a:solidFill>
+                  <a:srgbClr val="55677A"/>
+                </a:solidFill>
+                <a:latin typeface="Arial"/>
+              </a:rPr>
+              <a:t>allen</a:t>
+            </a:r>
+            <a:r>
+              <a:rPr sz="1200" b="0" dirty="0">
+                <a:solidFill>
+                  <a:srgbClr val="55677A"/>
+                </a:solidFill>
+                <a:latin typeface="Arial"/>
+              </a:rPr>
+              <a:t> </a:t>
+            </a:r>
+            <a:r>
+              <a:rPr sz="1200" b="0" dirty="0" err="1">
+                <a:solidFill>
+                  <a:srgbClr val="55677A"/>
+                </a:solidFill>
+                <a:latin typeface="Arial"/>
+              </a:rPr>
+              <a:t>Fällen</a:t>
+            </a:r>
+            <a:r>
+              <a:rPr sz="1200" b="0" dirty="0">
+                <a:solidFill>
+                  <a:srgbClr val="55677A"/>
+                </a:solidFill>
+                <a:latin typeface="Arial"/>
+              </a:rPr>
+              <a:t> leer</a:t>
+            </a:r>
+            <a:r>
               <a:rPr sz="1200" b="0">
                 <a:solidFill>
                   <a:srgbClr val="55677A"/>
                 </a:solidFill>
                 <a:latin typeface="Arial"/>
               </a:rPr>
-              <a:t>Und sind bei fast allen Fällen leer. Was das heißt, ist eine Entscheidung, keine Tatsache.</a:t>
-            </a:r>
+              <a:t>. </a:t>
+            </a:r>
+            <a:endParaRPr sz="1200" b="0" dirty="0">
+              <a:solidFill>
+                <a:srgbClr val="55677A"/>
+              </a:solidFill>
+              <a:latin typeface="Arial"/>
+            </a:endParaRPr>
           </a:p>
         </p:txBody>
       </p:sp>
